--- a/docs/00_ブライダル業界/03_基本設計書/説明資料/DB設計_解説資料.pptx
+++ b/docs/00_ブライダル業界/03_基本設計書/説明資料/DB設計_解説資料.pptx
@@ -3569,6 +3569,10 @@
             <a:prstDash val="solid"/>
           </a:ln>
         </p:spPr>
+        <p:txBody>
+          <a:bodyPr/>
+          <a:p/>
+        </p:txBody>
       </p:sp>
       <p:sp>
         <p:nvSpPr>
@@ -3594,6 +3598,10 @@
             <a:prstDash val="solid"/>
           </a:ln>
         </p:spPr>
+        <p:txBody>
+          <a:bodyPr/>
+          <a:p/>
+        </p:txBody>
       </p:sp>
       <p:sp>
         <p:nvSpPr>
@@ -3659,6 +3667,10 @@
             <a:prstDash val="solid"/>
           </a:ln>
         </p:spPr>
+        <p:txBody>
+          <a:bodyPr/>
+          <a:p/>
+        </p:txBody>
       </p:sp>
       <p:sp>
         <p:nvSpPr>
@@ -3839,6 +3851,10 @@
             <a:prstDash val="solid"/>
           </a:ln>
         </p:spPr>
+        <p:txBody>
+          <a:bodyPr/>
+          <a:p/>
+        </p:txBody>
       </p:sp>
       <p:sp>
         <p:nvSpPr>
@@ -3864,6 +3880,10 @@
             <a:prstDash val="solid"/>
           </a:ln>
         </p:spPr>
+        <p:txBody>
+          <a:bodyPr/>
+          <a:p/>
+        </p:txBody>
       </p:sp>
       <p:sp>
         <p:nvSpPr>
@@ -4205,6 +4225,10 @@
             <a:prstDash val="solid"/>
           </a:ln>
         </p:spPr>
+        <p:txBody>
+          <a:bodyPr/>
+          <a:p/>
+        </p:txBody>
       </p:sp>
       <p:sp>
         <p:nvSpPr>
@@ -4230,6 +4254,10 @@
             <a:prstDash val="solid"/>
           </a:ln>
         </p:spPr>
+        <p:txBody>
+          <a:bodyPr/>
+          <a:p/>
+        </p:txBody>
       </p:sp>
       <p:sp>
         <p:nvSpPr>
@@ -4420,6 +4448,10 @@
             <a:prstDash val="solid"/>
           </a:ln>
         </p:spPr>
+        <p:txBody>
+          <a:bodyPr/>
+          <a:p/>
+        </p:txBody>
       </p:sp>
       <p:sp>
         <p:nvSpPr>
@@ -4612,6 +4644,10 @@
             <a:prstDash val="solid"/>
           </a:ln>
         </p:spPr>
+        <p:txBody>
+          <a:bodyPr/>
+          <a:p/>
+        </p:txBody>
       </p:sp>
       <p:sp>
         <p:nvSpPr>
@@ -4637,6 +4673,10 @@
             <a:prstDash val="solid"/>
           </a:ln>
         </p:spPr>
+        <p:txBody>
+          <a:bodyPr/>
+          <a:p/>
+        </p:txBody>
       </p:sp>
       <p:sp>
         <p:nvSpPr>
@@ -4827,6 +4867,10 @@
             <a:prstDash val="solid"/>
           </a:ln>
         </p:spPr>
+        <p:txBody>
+          <a:bodyPr/>
+          <a:p/>
+        </p:txBody>
       </p:sp>
       <p:sp>
         <p:nvSpPr>
@@ -5019,6 +5063,10 @@
             <a:prstDash val="solid"/>
           </a:ln>
         </p:spPr>
+        <p:txBody>
+          <a:bodyPr/>
+          <a:p/>
+        </p:txBody>
       </p:sp>
       <p:sp>
         <p:nvSpPr>
@@ -5044,6 +5092,10 @@
             <a:prstDash val="solid"/>
           </a:ln>
         </p:spPr>
+        <p:txBody>
+          <a:bodyPr/>
+          <a:p/>
+        </p:txBody>
       </p:sp>
       <p:sp>
         <p:nvSpPr>
@@ -5234,6 +5286,10 @@
             <a:prstDash val="solid"/>
           </a:ln>
         </p:spPr>
+        <p:txBody>
+          <a:bodyPr/>
+          <a:p/>
+        </p:txBody>
       </p:sp>
       <p:sp>
         <p:nvSpPr>
@@ -5426,6 +5482,10 @@
             <a:prstDash val="solid"/>
           </a:ln>
         </p:spPr>
+        <p:txBody>
+          <a:bodyPr/>
+          <a:p/>
+        </p:txBody>
       </p:sp>
       <p:sp>
         <p:nvSpPr>
@@ -5451,6 +5511,10 @@
             <a:prstDash val="solid"/>
           </a:ln>
         </p:spPr>
+        <p:txBody>
+          <a:bodyPr/>
+          <a:p/>
+        </p:txBody>
       </p:sp>
       <p:sp>
         <p:nvSpPr>
@@ -5792,6 +5856,10 @@
             <a:prstDash val="solid"/>
           </a:ln>
         </p:spPr>
+        <p:txBody>
+          <a:bodyPr/>
+          <a:p/>
+        </p:txBody>
       </p:sp>
       <p:sp>
         <p:nvSpPr>
@@ -5940,6 +6008,10 @@
             <a:tailEnd type="triangle"/>
           </a:ln>
         </p:spPr>
+        <p:txBody>
+          <a:bodyPr/>
+          <a:p/>
+        </p:txBody>
       </p:sp>
       <p:sp>
         <p:nvSpPr>
@@ -5967,6 +6039,10 @@
             <a:prstDash val="solid"/>
           </a:ln>
         </p:spPr>
+        <p:txBody>
+          <a:bodyPr/>
+          <a:p/>
+        </p:txBody>
       </p:sp>
       <p:sp>
         <p:nvSpPr>
@@ -6115,6 +6191,10 @@
             <a:tailEnd type="triangle"/>
           </a:ln>
         </p:spPr>
+        <p:txBody>
+          <a:bodyPr/>
+          <a:p/>
+        </p:txBody>
       </p:sp>
       <p:sp>
         <p:nvSpPr>
@@ -6142,6 +6222,10 @@
             <a:prstDash val="solid"/>
           </a:ln>
         </p:spPr>
+        <p:txBody>
+          <a:bodyPr/>
+          <a:p/>
+        </p:txBody>
       </p:sp>
       <p:sp>
         <p:nvSpPr>
@@ -6382,6 +6466,10 @@
             <a:prstDash val="solid"/>
           </a:ln>
         </p:spPr>
+        <p:txBody>
+          <a:bodyPr/>
+          <a:p/>
+        </p:txBody>
       </p:sp>
       <p:sp>
         <p:nvSpPr>
@@ -6600,6 +6688,10 @@
             <a:prstDash val="solid"/>
           </a:ln>
         </p:spPr>
+        <p:txBody>
+          <a:bodyPr/>
+          <a:p/>
+        </p:txBody>
       </p:sp>
       <p:sp>
         <p:nvSpPr>
@@ -6795,6 +6887,10 @@
             <a:prstDash val="solid"/>
           </a:ln>
         </p:spPr>
+        <p:txBody>
+          <a:bodyPr/>
+          <a:p/>
+        </p:txBody>
       </p:sp>
       <p:sp>
         <p:nvSpPr>
@@ -6990,6 +7086,10 @@
             <a:prstDash val="solid"/>
           </a:ln>
         </p:spPr>
+        <p:txBody>
+          <a:bodyPr/>
+          <a:p/>
+        </p:txBody>
       </p:sp>
       <p:sp>
         <p:nvSpPr>
@@ -7185,6 +7285,10 @@
             <a:prstDash val="solid"/>
           </a:ln>
         </p:spPr>
+        <p:txBody>
+          <a:bodyPr/>
+          <a:p/>
+        </p:txBody>
       </p:sp>
       <p:sp>
         <p:nvSpPr>
@@ -7380,6 +7484,10 @@
             <a:prstDash val="solid"/>
           </a:ln>
         </p:spPr>
+        <p:txBody>
+          <a:bodyPr/>
+          <a:p/>
+        </p:txBody>
       </p:sp>
       <p:sp>
         <p:nvSpPr>
@@ -7734,7 +7842,7 @@
                 <a:ea typeface="BIZ UDPゴシック" pitchFamily="34" charset="-122"/>
                 <a:cs typeface="BIZ UDPゴシック" pitchFamily="34" charset="-120"/>
               </a:rPr>
-              <a:t>Claude APIが返したテキストの置き場所が、あらかじめ決めてあります。</a:t>
+              <a:t>AI（Gemini API）が返したテキストの置き場所が、あらかじめ決めてあります。</a:t>
             </a:r>
             <a:endParaRPr lang="en-US" sz="1500" dirty="0"/>
           </a:p>
@@ -7766,6 +7874,10 @@
             <a:prstDash val="solid"/>
           </a:ln>
         </p:spPr>
+        <p:txBody>
+          <a:bodyPr/>
+          <a:p/>
+        </p:txBody>
       </p:sp>
       <p:sp>
         <p:nvSpPr>
@@ -7871,6 +7983,10 @@
             <a:tailEnd type="triangle"/>
           </a:ln>
         </p:spPr>
+        <p:txBody>
+          <a:bodyPr/>
+          <a:p/>
+        </p:txBody>
       </p:sp>
       <p:sp>
         <p:nvSpPr>
@@ -7898,6 +8014,10 @@
             <a:prstDash val="solid"/>
           </a:ln>
         </p:spPr>
+        <p:txBody>
+          <a:bodyPr/>
+          <a:p/>
+        </p:txBody>
       </p:sp>
       <p:sp>
         <p:nvSpPr>
@@ -7932,7 +8052,7 @@
                 <a:ea typeface="BIZ UDPゴシック" pitchFamily="34" charset="-122"/>
                 <a:cs typeface="BIZ UDPゴシック" pitchFamily="34" charset="-120"/>
               </a:rPr>
-              <a:t>Claude API</a:t>
+              <a:t>Gemini API</a:t>
             </a:r>
             <a:endParaRPr lang="en-US" sz="1800" dirty="0"/>
           </a:p>
@@ -8023,6 +8143,10 @@
             <a:tailEnd type="triangle"/>
           </a:ln>
         </p:spPr>
+        <p:txBody>
+          <a:bodyPr/>
+          <a:p/>
+        </p:txBody>
       </p:sp>
       <p:sp>
         <p:nvSpPr>
@@ -8050,6 +8174,10 @@
             <a:prstDash val="solid"/>
           </a:ln>
         </p:spPr>
+        <p:txBody>
+          <a:bodyPr/>
+          <a:p/>
+        </p:txBody>
       </p:sp>
       <p:sp>
         <p:nvSpPr>
@@ -8201,6 +8329,10 @@
             <a:prstDash val="solid"/>
           </a:ln>
         </p:spPr>
+        <p:txBody>
+          <a:bodyPr/>
+          <a:p/>
+        </p:txBody>
       </p:sp>
       <p:sp>
         <p:nvSpPr>
@@ -8461,6 +8593,10 @@
             <a:prstDash val="solid"/>
           </a:ln>
         </p:spPr>
+        <p:txBody>
+          <a:bodyPr/>
+          <a:p/>
+        </p:txBody>
       </p:sp>
       <p:sp>
         <p:nvSpPr>
@@ -8566,6 +8702,10 @@
             <a:tailEnd type="triangle"/>
           </a:ln>
         </p:spPr>
+        <p:txBody>
+          <a:bodyPr/>
+          <a:p/>
+        </p:txBody>
       </p:sp>
       <p:sp>
         <p:nvSpPr>
@@ -8635,6 +8775,10 @@
             <a:prstDash val="solid"/>
           </a:ln>
         </p:spPr>
+        <p:txBody>
+          <a:bodyPr/>
+          <a:p/>
+        </p:txBody>
       </p:sp>
       <p:sp>
         <p:nvSpPr>
@@ -8763,6 +8907,10 @@
             <a:prstDash val="solid"/>
           </a:ln>
         </p:spPr>
+        <p:txBody>
+          <a:bodyPr/>
+          <a:p/>
+        </p:txBody>
       </p:sp>
       <p:sp>
         <p:nvSpPr>
@@ -8936,6 +9084,10 @@
             <a:prstDash val="solid"/>
           </a:ln>
         </p:spPr>
+        <p:txBody>
+          <a:bodyPr/>
+          <a:p/>
+        </p:txBody>
       </p:sp>
       <p:sp>
         <p:nvSpPr>
@@ -9047,6 +9199,10 @@
             <a:prstDash val="solid"/>
           </a:ln>
         </p:spPr>
+        <p:txBody>
+          <a:bodyPr/>
+          <a:p/>
+        </p:txBody>
       </p:sp>
       <p:sp>
         <p:nvSpPr>
@@ -9307,6 +9463,10 @@
             <a:prstDash val="solid"/>
           </a:ln>
         </p:spPr>
+        <p:txBody>
+          <a:bodyPr/>
+          <a:p/>
+        </p:txBody>
       </p:sp>
       <p:sp>
         <p:nvSpPr>
@@ -9332,6 +9492,10 @@
             <a:prstDash val="solid"/>
           </a:ln>
         </p:spPr>
+        <p:txBody>
+          <a:bodyPr/>
+          <a:p/>
+        </p:txBody>
       </p:sp>
       <p:sp>
         <p:nvSpPr>
@@ -9566,6 +9730,10 @@
             <a:prstDash val="solid"/>
           </a:ln>
         </p:spPr>
+        <p:txBody>
+          <a:bodyPr/>
+          <a:p/>
+        </p:txBody>
       </p:sp>
       <p:sp>
         <p:nvSpPr>
@@ -9591,6 +9759,10 @@
             <a:prstDash val="solid"/>
           </a:ln>
         </p:spPr>
+        <p:txBody>
+          <a:bodyPr/>
+          <a:p/>
+        </p:txBody>
       </p:sp>
       <p:sp>
         <p:nvSpPr>
@@ -9865,6 +10037,10 @@
             <a:prstDash val="solid"/>
           </a:ln>
         </p:spPr>
+        <p:txBody>
+          <a:bodyPr/>
+          <a:p/>
+        </p:txBody>
       </p:sp>
       <p:sp>
         <p:nvSpPr>
@@ -10083,6 +10259,10 @@
             <a:prstDash val="solid"/>
           </a:ln>
         </p:spPr>
+        <p:txBody>
+          <a:bodyPr/>
+          <a:p/>
+        </p:txBody>
       </p:sp>
       <p:sp>
         <p:nvSpPr>
@@ -10188,6 +10368,10 @@
             <a:tailEnd type="triangle"/>
           </a:ln>
         </p:spPr>
+        <p:txBody>
+          <a:bodyPr/>
+          <a:p/>
+        </p:txBody>
       </p:sp>
       <p:sp>
         <p:nvSpPr>
@@ -10257,6 +10441,10 @@
             <a:prstDash val="solid"/>
           </a:ln>
         </p:spPr>
+        <p:txBody>
+          <a:bodyPr/>
+          <a:p/>
+        </p:txBody>
       </p:sp>
       <p:sp>
         <p:nvSpPr>
@@ -10362,6 +10550,10 @@
             <a:tailEnd type="triangle"/>
           </a:ln>
         </p:spPr>
+        <p:txBody>
+          <a:bodyPr/>
+          <a:p/>
+        </p:txBody>
       </p:sp>
       <p:sp>
         <p:nvSpPr>
@@ -10431,6 +10623,10 @@
             <a:prstDash val="solid"/>
           </a:ln>
         </p:spPr>
+        <p:txBody>
+          <a:bodyPr/>
+          <a:p/>
+        </p:txBody>
       </p:sp>
       <p:sp>
         <p:nvSpPr>
@@ -10507,7 +10703,7 @@
                 <a:ea typeface="BIZ UDPゴシック" pitchFamily="34" charset="-122"/>
                 <a:cs typeface="BIZ UDPゴシック" pitchFamily="34" charset="-120"/>
               </a:rPr>
-              <a:t>S3のURL・ファイル名・サイズ</a:t>
+              <a:t>保存場所・ファイル名・サイズ</a:t>
             </a:r>
             <a:endParaRPr lang="en-US" sz="1400" dirty="0"/>
           </a:p>
@@ -10539,6 +10735,10 @@
             <a:prstDash val="solid"/>
           </a:ln>
         </p:spPr>
+        <p:txBody>
+          <a:bodyPr/>
+          <a:p/>
+        </p:txBody>
       </p:sp>
       <p:sp>
         <p:nvSpPr>
@@ -10618,7 +10818,7 @@
                 <a:ea typeface="BIZ UDPゴシック" pitchFamily="34" charset="-122"/>
                 <a:cs typeface="BIZ UDPゴシック" pitchFamily="34" charset="-120"/>
               </a:rPr>
-              <a:t>ファイル名・形式・サイズ・S3のURL。</a:t>
+              <a:t>ファイル名・形式・サイズ・保存場所。</a:t>
             </a:r>
             <a:endParaRPr lang="en-US" sz="1500" dirty="0"/>
           </a:p>
@@ -10670,6 +10870,10 @@
             <a:prstDash val="solid"/>
           </a:ln>
         </p:spPr>
+        <p:txBody>
+          <a:bodyPr/>
+          <a:p/>
+        </p:txBody>
       </p:sp>
       <p:sp>
         <p:nvSpPr>
@@ -10749,7 +10953,7 @@
                 <a:ea typeface="BIZ UDPゴシック" pitchFamily="34" charset="-122"/>
                 <a:cs typeface="BIZ UDPゴシック" pitchFamily="34" charset="-120"/>
               </a:rPr>
-              <a:t>画像やPDFの実体。AWS S3に置き、DBはURLで参照するだけ。</a:t>
+              <a:t>画像やPDFの実体。保存先フォルダ（uploads）に置き、DBは保存場所を参照するだけ。</a:t>
             </a:r>
             <a:endParaRPr lang="en-US" sz="1500" dirty="0"/>
           </a:p>
@@ -10950,6 +11154,10 @@
             <a:prstDash val="solid"/>
           </a:ln>
         </p:spPr>
+        <p:txBody>
+          <a:bodyPr/>
+          <a:p/>
+        </p:txBody>
       </p:sp>
       <p:sp>
         <p:nvSpPr>
@@ -11103,6 +11311,10 @@
             <a:prstDash val="solid"/>
           </a:ln>
         </p:spPr>
+        <p:txBody>
+          <a:bodyPr/>
+          <a:p/>
+        </p:txBody>
       </p:sp>
       <p:sp>
         <p:nvSpPr>
@@ -11128,6 +11340,10 @@
             <a:prstDash val="solid"/>
           </a:ln>
         </p:spPr>
+        <p:txBody>
+          <a:bodyPr/>
+          <a:p/>
+        </p:txBody>
       </p:sp>
       <p:sp>
         <p:nvSpPr>
@@ -11278,6 +11494,10 @@
             <a:prstDash val="solid"/>
           </a:ln>
         </p:spPr>
+        <p:txBody>
+          <a:bodyPr/>
+          <a:p/>
+        </p:txBody>
       </p:sp>
       <p:sp>
         <p:nvSpPr>
@@ -11303,6 +11523,10 @@
             <a:prstDash val="solid"/>
           </a:ln>
         </p:spPr>
+        <p:txBody>
+          <a:bodyPr/>
+          <a:p/>
+        </p:txBody>
       </p:sp>
       <p:sp>
         <p:nvSpPr>
@@ -11453,6 +11677,10 @@
             <a:prstDash val="solid"/>
           </a:ln>
         </p:spPr>
+        <p:txBody>
+          <a:bodyPr/>
+          <a:p/>
+        </p:txBody>
       </p:sp>
       <p:sp>
         <p:nvSpPr>
@@ -11478,6 +11706,10 @@
             <a:prstDash val="solid"/>
           </a:ln>
         </p:spPr>
+        <p:txBody>
+          <a:bodyPr/>
+          <a:p/>
+        </p:txBody>
       </p:sp>
       <p:sp>
         <p:nvSpPr>
@@ -11628,6 +11860,10 @@
             <a:prstDash val="solid"/>
           </a:ln>
         </p:spPr>
+        <p:txBody>
+          <a:bodyPr/>
+          <a:p/>
+        </p:txBody>
       </p:sp>
       <p:sp>
         <p:nvSpPr>
@@ -11846,6 +12082,10 @@
             <a:prstDash val="solid"/>
           </a:ln>
         </p:spPr>
+        <p:txBody>
+          <a:bodyPr/>
+          <a:p/>
+        </p:txBody>
       </p:sp>
       <p:sp>
         <p:nvSpPr>
@@ -11871,6 +12111,10 @@
             <a:prstDash val="solid"/>
           </a:ln>
         </p:spPr>
+        <p:txBody>
+          <a:bodyPr/>
+          <a:p/>
+        </p:txBody>
       </p:sp>
       <p:sp>
         <p:nvSpPr>
@@ -12080,6 +12324,10 @@
             <a:tailEnd type="triangle"/>
           </a:ln>
         </p:spPr>
+        <p:txBody>
+          <a:bodyPr/>
+          <a:p/>
+        </p:txBody>
       </p:sp>
       <p:sp>
         <p:nvSpPr>
@@ -12107,6 +12355,10 @@
             <a:prstDash val="solid"/>
           </a:ln>
         </p:spPr>
+        <p:txBody>
+          <a:bodyPr/>
+          <a:p/>
+        </p:txBody>
       </p:sp>
       <p:sp>
         <p:nvSpPr>
@@ -12132,6 +12384,10 @@
             <a:prstDash val="solid"/>
           </a:ln>
         </p:spPr>
+        <p:txBody>
+          <a:bodyPr/>
+          <a:p/>
+        </p:txBody>
       </p:sp>
       <p:sp>
         <p:nvSpPr>
@@ -12361,6 +12617,10 @@
             <a:tailEnd type="triangle"/>
           </a:ln>
         </p:spPr>
+        <p:txBody>
+          <a:bodyPr/>
+          <a:p/>
+        </p:txBody>
       </p:sp>
       <p:sp>
         <p:nvSpPr>
@@ -12388,6 +12648,10 @@
             <a:prstDash val="solid"/>
           </a:ln>
         </p:spPr>
+        <p:txBody>
+          <a:bodyPr/>
+          <a:p/>
+        </p:txBody>
       </p:sp>
       <p:sp>
         <p:nvSpPr>
@@ -12413,6 +12677,10 @@
             <a:prstDash val="solid"/>
           </a:ln>
         </p:spPr>
+        <p:txBody>
+          <a:bodyPr/>
+          <a:p/>
+        </p:txBody>
       </p:sp>
       <p:sp>
         <p:nvSpPr>
@@ -12642,6 +12910,10 @@
             <a:tailEnd type="triangle"/>
           </a:ln>
         </p:spPr>
+        <p:txBody>
+          <a:bodyPr/>
+          <a:p/>
+        </p:txBody>
       </p:sp>
       <p:sp>
         <p:nvSpPr>
@@ -12669,6 +12941,10 @@
             <a:prstDash val="solid"/>
           </a:ln>
         </p:spPr>
+        <p:txBody>
+          <a:bodyPr/>
+          <a:p/>
+        </p:txBody>
       </p:sp>
       <p:sp>
         <p:nvSpPr>
@@ -12694,6 +12970,10 @@
             <a:prstDash val="solid"/>
           </a:ln>
         </p:spPr>
+        <p:txBody>
+          <a:bodyPr/>
+          <a:p/>
+        </p:txBody>
       </p:sp>
       <p:sp>
         <p:nvSpPr>
@@ -12923,6 +13203,10 @@
             <a:tailEnd type="triangle"/>
           </a:ln>
         </p:spPr>
+        <p:txBody>
+          <a:bodyPr/>
+          <a:p/>
+        </p:txBody>
       </p:sp>
       <p:sp>
         <p:nvSpPr>
@@ -12950,6 +13234,10 @@
             <a:prstDash val="solid"/>
           </a:ln>
         </p:spPr>
+        <p:txBody>
+          <a:bodyPr/>
+          <a:p/>
+        </p:txBody>
       </p:sp>
       <p:sp>
         <p:nvSpPr>
@@ -12975,6 +13263,10 @@
             <a:prstDash val="solid"/>
           </a:ln>
         </p:spPr>
+        <p:txBody>
+          <a:bodyPr/>
+          <a:p/>
+        </p:txBody>
       </p:sp>
       <p:sp>
         <p:nvSpPr>
@@ -13187,6 +13479,10 @@
             <a:prstDash val="solid"/>
           </a:ln>
         </p:spPr>
+        <p:txBody>
+          <a:bodyPr/>
+          <a:p/>
+        </p:txBody>
       </p:sp>
       <p:sp>
         <p:nvSpPr>
@@ -13447,6 +13743,10 @@
             <a:prstDash val="solid"/>
           </a:ln>
         </p:spPr>
+        <p:txBody>
+          <a:bodyPr/>
+          <a:p/>
+        </p:txBody>
       </p:sp>
       <p:sp>
         <p:nvSpPr>
@@ -13472,6 +13772,10 @@
             <a:prstDash val="solid"/>
           </a:ln>
         </p:spPr>
+        <p:txBody>
+          <a:bodyPr/>
+          <a:p/>
+        </p:txBody>
       </p:sp>
       <p:sp>
         <p:nvSpPr>
@@ -13664,6 +13968,10 @@
             <a:prstDash val="solid"/>
           </a:ln>
         </p:spPr>
+        <p:txBody>
+          <a:bodyPr/>
+          <a:p/>
+        </p:txBody>
       </p:sp>
       <p:sp>
         <p:nvSpPr>
@@ -13689,6 +13997,10 @@
             <a:prstDash val="solid"/>
           </a:ln>
         </p:spPr>
+        <p:txBody>
+          <a:bodyPr/>
+          <a:p/>
+        </p:txBody>
       </p:sp>
       <p:sp>
         <p:nvSpPr>
@@ -13881,6 +14193,10 @@
             <a:prstDash val="solid"/>
           </a:ln>
         </p:spPr>
+        <p:txBody>
+          <a:bodyPr/>
+          <a:p/>
+        </p:txBody>
       </p:sp>
       <p:sp>
         <p:nvSpPr>
@@ -13906,6 +14222,10 @@
             <a:prstDash val="solid"/>
           </a:ln>
         </p:spPr>
+        <p:txBody>
+          <a:bodyPr/>
+          <a:p/>
+        </p:txBody>
       </p:sp>
       <p:sp>
         <p:nvSpPr>
@@ -14209,6 +14529,10 @@
             <a:prstDash val="solid"/>
           </a:ln>
         </p:spPr>
+        <p:txBody>
+          <a:bodyPr/>
+          <a:p/>
+        </p:txBody>
       </p:sp>
       <p:sp>
         <p:nvSpPr>
@@ -14234,6 +14558,10 @@
             <a:prstDash val="solid"/>
           </a:ln>
         </p:spPr>
+        <p:txBody>
+          <a:bodyPr/>
+          <a:p/>
+        </p:txBody>
       </p:sp>
       <p:sp>
         <p:nvSpPr>
@@ -17182,6 +17510,10 @@
             <a:prstDash val="solid"/>
           </a:ln>
         </p:spPr>
+        <p:txBody>
+          <a:bodyPr/>
+          <a:p/>
+        </p:txBody>
       </p:sp>
       <p:sp>
         <p:nvSpPr>
@@ -24213,7 +24545,7 @@
                           <a:ea typeface="BIZ UDPゴシック" pitchFamily="34" charset="-122"/>
                           <a:cs typeface="BIZ UDPゴシック" pitchFamily="34" charset="-120"/>
                         </a:rPr>
-                        <a:t>S3上のURL</a:t>
+                        <a:t>保存場所（パス）</a:t>
                       </a:r>
                       <a:endParaRPr lang="en-US" sz="1700" dirty="0">
                         <a:latin typeface="BIZ UDPゴシック" charset="0"/>
@@ -24685,6 +25017,10 @@
             <a:prstDash val="solid"/>
           </a:ln>
         </p:spPr>
+        <p:txBody>
+          <a:bodyPr/>
+          <a:p/>
+        </p:txBody>
       </p:sp>
       <p:sp>
         <p:nvSpPr>
@@ -25877,7 +26213,7 @@
                           <a:ea typeface="BIZ UDPゴシック" pitchFamily="34" charset="-122"/>
                           <a:cs typeface="BIZ UDPゴシック" pitchFamily="34" charset="-120"/>
                         </a:rPr>
-                        <a:t>S3上の画像URL</a:t>
+                        <a:t>画像の場所（パス）</a:t>
                       </a:r>
                       <a:endParaRPr lang="en-US" sz="1600" dirty="0">
                         <a:latin typeface="BIZ UDPゴシック" charset="0"/>
@@ -26043,6 +26379,10 @@
             <a:prstDash val="solid"/>
           </a:ln>
         </p:spPr>
+        <p:txBody>
+          <a:bodyPr/>
+          <a:p/>
+        </p:txBody>
       </p:sp>
       <p:sp>
         <p:nvSpPr>
@@ -27380,6 +27720,10 @@
             <a:prstDash val="solid"/>
           </a:ln>
         </p:spPr>
+        <p:txBody>
+          <a:bodyPr/>
+          <a:p/>
+        </p:txBody>
       </p:sp>
       <p:sp>
         <p:nvSpPr>
@@ -28827,6 +29171,10 @@
             <a:prstDash val="solid"/>
           </a:ln>
         </p:spPr>
+        <p:txBody>
+          <a:bodyPr/>
+          <a:p/>
+        </p:txBody>
       </p:sp>
       <p:sp>
         <p:nvSpPr>
@@ -29045,6 +29393,10 @@
             <a:prstDash val="solid"/>
           </a:ln>
         </p:spPr>
+        <p:txBody>
+          <a:bodyPr/>
+          <a:p/>
+        </p:txBody>
       </p:sp>
       <p:sp>
         <p:nvSpPr>
@@ -29070,6 +29422,10 @@
             <a:prstDash val="solid"/>
           </a:ln>
         </p:spPr>
+        <p:txBody>
+          <a:bodyPr/>
+          <a:p/>
+        </p:txBody>
       </p:sp>
       <p:sp>
         <p:nvSpPr>
@@ -29262,6 +29618,10 @@
             <a:prstDash val="solid"/>
           </a:ln>
         </p:spPr>
+        <p:txBody>
+          <a:bodyPr/>
+          <a:p/>
+        </p:txBody>
       </p:sp>
       <p:sp>
         <p:nvSpPr>
@@ -29287,6 +29647,10 @@
             <a:prstDash val="solid"/>
           </a:ln>
         </p:spPr>
+        <p:txBody>
+          <a:bodyPr/>
+          <a:p/>
+        </p:txBody>
       </p:sp>
       <p:sp>
         <p:nvSpPr>
@@ -29479,6 +29843,10 @@
             <a:prstDash val="solid"/>
           </a:ln>
         </p:spPr>
+        <p:txBody>
+          <a:bodyPr/>
+          <a:p/>
+        </p:txBody>
       </p:sp>
       <p:sp>
         <p:nvSpPr>
@@ -29504,6 +29872,10 @@
             <a:prstDash val="solid"/>
           </a:ln>
         </p:spPr>
+        <p:txBody>
+          <a:bodyPr/>
+          <a:p/>
+        </p:txBody>
       </p:sp>
       <p:sp>
         <p:nvSpPr>
@@ -29696,6 +30068,10 @@
             <a:prstDash val="solid"/>
           </a:ln>
         </p:spPr>
+        <p:txBody>
+          <a:bodyPr/>
+          <a:p/>
+        </p:txBody>
       </p:sp>
       <p:sp>
         <p:nvSpPr>
@@ -29721,6 +30097,10 @@
             <a:prstDash val="solid"/>
           </a:ln>
         </p:spPr>
+        <p:txBody>
+          <a:bodyPr/>
+          <a:p/>
+        </p:txBody>
       </p:sp>
       <p:sp>
         <p:nvSpPr>
@@ -30062,6 +30442,10 @@
             <a:prstDash val="solid"/>
           </a:ln>
         </p:spPr>
+        <p:txBody>
+          <a:bodyPr/>
+          <a:p/>
+        </p:txBody>
       </p:sp>
       <p:sp>
         <p:nvSpPr>
@@ -30087,6 +30471,10 @@
             <a:prstDash val="solid"/>
           </a:ln>
         </p:spPr>
+        <p:txBody>
+          <a:bodyPr/>
+          <a:p/>
+        </p:txBody>
       </p:sp>
       <p:sp>
         <p:nvSpPr>
@@ -30279,6 +30667,10 @@
             <a:prstDash val="solid"/>
           </a:ln>
         </p:spPr>
+        <p:txBody>
+          <a:bodyPr/>
+          <a:p/>
+        </p:txBody>
       </p:sp>
       <p:sp>
         <p:nvSpPr>
@@ -30304,6 +30696,10 @@
             <a:prstDash val="solid"/>
           </a:ln>
         </p:spPr>
+        <p:txBody>
+          <a:bodyPr/>
+          <a:p/>
+        </p:txBody>
       </p:sp>
       <p:sp>
         <p:nvSpPr>
@@ -30496,6 +30892,10 @@
             <a:prstDash val="solid"/>
           </a:ln>
         </p:spPr>
+        <p:txBody>
+          <a:bodyPr/>
+          <a:p/>
+        </p:txBody>
       </p:sp>
       <p:sp>
         <p:nvSpPr>
@@ -30521,6 +30921,10 @@
             <a:prstDash val="solid"/>
           </a:ln>
         </p:spPr>
+        <p:txBody>
+          <a:bodyPr/>
+          <a:p/>
+        </p:txBody>
       </p:sp>
       <p:sp>
         <p:nvSpPr>
@@ -30824,6 +31228,10 @@
             <a:prstDash val="solid"/>
           </a:ln>
         </p:spPr>
+        <p:txBody>
+          <a:bodyPr/>
+          <a:p/>
+        </p:txBody>
       </p:sp>
       <p:sp>
         <p:nvSpPr>
@@ -31390,6 +31798,10 @@
             <a:prstDash val="solid"/>
           </a:ln>
         </p:spPr>
+        <p:txBody>
+          <a:bodyPr/>
+          <a:p/>
+        </p:txBody>
       </p:sp>
       <p:sp>
         <p:nvSpPr>
@@ -33030,6 +33442,10 @@
             <a:prstDash val="solid"/>
           </a:ln>
         </p:spPr>
+        <p:txBody>
+          <a:bodyPr/>
+          <a:p/>
+        </p:txBody>
       </p:sp>
       <p:sp>
         <p:nvSpPr>
@@ -33248,6 +33664,10 @@
             <a:prstDash val="solid"/>
           </a:ln>
         </p:spPr>
+        <p:txBody>
+          <a:bodyPr/>
+          <a:p/>
+        </p:txBody>
       </p:sp>
       <p:sp>
         <p:nvSpPr>
@@ -33273,6 +33693,10 @@
             <a:prstDash val="solid"/>
           </a:ln>
         </p:spPr>
+        <p:txBody>
+          <a:bodyPr/>
+          <a:p/>
+        </p:txBody>
       </p:sp>
       <p:sp>
         <p:nvSpPr>
@@ -33485,6 +33909,10 @@
             <a:prstDash val="solid"/>
           </a:ln>
         </p:spPr>
+        <p:txBody>
+          <a:bodyPr/>
+          <a:p/>
+        </p:txBody>
       </p:sp>
       <p:sp>
         <p:nvSpPr>
@@ -33510,6 +33938,10 @@
             <a:prstDash val="solid"/>
           </a:ln>
         </p:spPr>
+        <p:txBody>
+          <a:bodyPr/>
+          <a:p/>
+        </p:txBody>
       </p:sp>
       <p:sp>
         <p:nvSpPr>
@@ -33742,6 +34174,10 @@
             <a:prstDash val="solid"/>
           </a:ln>
         </p:spPr>
+        <p:txBody>
+          <a:bodyPr/>
+          <a:p/>
+        </p:txBody>
       </p:sp>
       <p:sp>
         <p:nvSpPr>
@@ -33767,6 +34203,10 @@
             <a:prstDash val="solid"/>
           </a:ln>
         </p:spPr>
+        <p:txBody>
+          <a:bodyPr/>
+          <a:p/>
+        </p:txBody>
       </p:sp>
       <p:sp>
         <p:nvSpPr>
@@ -33979,6 +34419,10 @@
             <a:prstDash val="solid"/>
           </a:ln>
         </p:spPr>
+        <p:txBody>
+          <a:bodyPr/>
+          <a:p/>
+        </p:txBody>
       </p:sp>
       <p:sp>
         <p:nvSpPr>
@@ -34004,6 +34448,10 @@
             <a:prstDash val="solid"/>
           </a:ln>
         </p:spPr>
+        <p:txBody>
+          <a:bodyPr/>
+          <a:p/>
+        </p:txBody>
       </p:sp>
       <p:sp>
         <p:nvSpPr>
@@ -34196,6 +34644,10 @@
             <a:prstDash val="solid"/>
           </a:ln>
         </p:spPr>
+        <p:txBody>
+          <a:bodyPr/>
+          <a:p/>
+        </p:txBody>
       </p:sp>
       <p:sp>
         <p:nvSpPr>
@@ -34221,6 +34673,10 @@
             <a:prstDash val="solid"/>
           </a:ln>
         </p:spPr>
+        <p:txBody>
+          <a:bodyPr/>
+          <a:p/>
+        </p:txBody>
       </p:sp>
       <p:sp>
         <p:nvSpPr>
@@ -34562,6 +35018,10 @@
             <a:prstDash val="solid"/>
           </a:ln>
         </p:spPr>
+        <p:txBody>
+          <a:bodyPr/>
+          <a:p/>
+        </p:txBody>
       </p:sp>
       <p:sp>
         <p:nvSpPr>
@@ -34631,6 +35091,10 @@
             <a:prstDash val="solid"/>
           </a:ln>
         </p:spPr>
+        <p:txBody>
+          <a:bodyPr/>
+          <a:p/>
+        </p:txBody>
       </p:sp>
       <p:sp>
         <p:nvSpPr>
@@ -34694,6 +35158,10 @@
             <a:tailEnd type="triangle"/>
           </a:ln>
         </p:spPr>
+        <p:txBody>
+          <a:bodyPr/>
+          <a:p/>
+        </p:txBody>
       </p:sp>
       <p:sp>
         <p:nvSpPr>
@@ -34805,6 +35273,10 @@
             <a:prstDash val="solid"/>
           </a:ln>
         </p:spPr>
+        <p:txBody>
+          <a:bodyPr/>
+          <a:p/>
+        </p:txBody>
       </p:sp>
       <p:sp>
         <p:nvSpPr>
@@ -34933,6 +35405,10 @@
             <a:prstDash val="solid"/>
           </a:ln>
         </p:spPr>
+        <p:txBody>
+          <a:bodyPr/>
+          <a:p/>
+        </p:txBody>
       </p:sp>
       <p:sp>
         <p:nvSpPr>
@@ -35002,6 +35478,10 @@
             <a:prstDash val="solid"/>
           </a:ln>
         </p:spPr>
+        <p:txBody>
+          <a:bodyPr/>
+          <a:p/>
+        </p:txBody>
       </p:sp>
       <p:sp>
         <p:nvSpPr>
@@ -35064,6 +35544,10 @@
             <a:prstDash val="solid"/>
           </a:ln>
         </p:spPr>
+        <p:txBody>
+          <a:bodyPr/>
+          <a:p/>
+        </p:txBody>
       </p:sp>
       <p:sp>
         <p:nvSpPr>
@@ -35175,6 +35659,10 @@
             <a:prstDash val="solid"/>
           </a:ln>
         </p:spPr>
+        <p:txBody>
+          <a:bodyPr/>
+          <a:p/>
+        </p:txBody>
       </p:sp>
       <p:sp>
         <p:nvSpPr>
@@ -35452,6 +35940,10 @@
             <a:prstDash val="solid"/>
           </a:ln>
         </p:spPr>
+        <p:txBody>
+          <a:bodyPr/>
+          <a:p/>
+        </p:txBody>
       </p:sp>
       <p:sp>
         <p:nvSpPr>
@@ -35521,6 +36013,10 @@
             <a:prstDash val="solid"/>
           </a:ln>
         </p:spPr>
+        <p:txBody>
+          <a:bodyPr/>
+          <a:p/>
+        </p:txBody>
       </p:sp>
       <p:sp>
         <p:nvSpPr>
@@ -35587,6 +36083,10 @@
             <a:prstDash val="solid"/>
           </a:ln>
         </p:spPr>
+        <p:txBody>
+          <a:bodyPr/>
+          <a:p/>
+        </p:txBody>
       </p:sp>
       <p:sp>
         <p:nvSpPr>
@@ -35653,6 +36153,10 @@
             <a:prstDash val="solid"/>
           </a:ln>
         </p:spPr>
+        <p:txBody>
+          <a:bodyPr/>
+          <a:p/>
+        </p:txBody>
       </p:sp>
       <p:sp>
         <p:nvSpPr>
@@ -35722,6 +36226,10 @@
             <a:prstDash val="solid"/>
           </a:ln>
         </p:spPr>
+        <p:txBody>
+          <a:bodyPr/>
+          <a:p/>
+        </p:txBody>
       </p:sp>
       <p:sp>
         <p:nvSpPr>
@@ -35788,6 +36296,10 @@
             <a:prstDash val="solid"/>
           </a:ln>
         </p:spPr>
+        <p:txBody>
+          <a:bodyPr/>
+          <a:p/>
+        </p:txBody>
       </p:sp>
       <p:sp>
         <p:nvSpPr>
@@ -35854,6 +36366,10 @@
             <a:prstDash val="solid"/>
           </a:ln>
         </p:spPr>
+        <p:txBody>
+          <a:bodyPr/>
+          <a:p/>
+        </p:txBody>
       </p:sp>
       <p:sp>
         <p:nvSpPr>
@@ -35920,6 +36436,10 @@
             <a:prstDash val="solid"/>
           </a:ln>
         </p:spPr>
+        <p:txBody>
+          <a:bodyPr/>
+          <a:p/>
+        </p:txBody>
       </p:sp>
       <p:sp>
         <p:nvSpPr>
@@ -35989,6 +36509,10 @@
             <a:prstDash val="solid"/>
           </a:ln>
         </p:spPr>
+        <p:txBody>
+          <a:bodyPr/>
+          <a:p/>
+        </p:txBody>
       </p:sp>
       <p:sp>
         <p:nvSpPr>
@@ -36055,6 +36579,10 @@
             <a:prstDash val="solid"/>
           </a:ln>
         </p:spPr>
+        <p:txBody>
+          <a:bodyPr/>
+          <a:p/>
+        </p:txBody>
       </p:sp>
       <p:sp>
         <p:nvSpPr>
@@ -36121,6 +36649,10 @@
             <a:prstDash val="solid"/>
           </a:ln>
         </p:spPr>
+        <p:txBody>
+          <a:bodyPr/>
+          <a:p/>
+        </p:txBody>
       </p:sp>
       <p:sp>
         <p:nvSpPr>
@@ -36190,6 +36722,10 @@
             <a:prstDash val="solid"/>
           </a:ln>
         </p:spPr>
+        <p:txBody>
+          <a:bodyPr/>
+          <a:p/>
+        </p:txBody>
       </p:sp>
       <p:sp>
         <p:nvSpPr>
@@ -36256,6 +36792,10 @@
             <a:prstDash val="solid"/>
           </a:ln>
         </p:spPr>
+        <p:txBody>
+          <a:bodyPr/>
+          <a:p/>
+        </p:txBody>
       </p:sp>
       <p:sp>
         <p:nvSpPr>
@@ -36322,6 +36862,10 @@
             <a:prstDash val="solid"/>
           </a:ln>
         </p:spPr>
+        <p:txBody>
+          <a:bodyPr/>
+          <a:p/>
+        </p:txBody>
       </p:sp>
       <p:sp>
         <p:nvSpPr>
@@ -36388,6 +36932,10 @@
             <a:prstDash val="solid"/>
           </a:ln>
         </p:spPr>
+        <p:txBody>
+          <a:bodyPr/>
+          <a:p/>
+        </p:txBody>
       </p:sp>
       <p:sp>
         <p:nvSpPr>
@@ -36457,6 +37005,10 @@
             <a:prstDash val="solid"/>
           </a:ln>
         </p:spPr>
+        <p:txBody>
+          <a:bodyPr/>
+          <a:p/>
+        </p:txBody>
       </p:sp>
       <p:sp>
         <p:nvSpPr>
@@ -36523,6 +37075,10 @@
             <a:prstDash val="solid"/>
           </a:ln>
         </p:spPr>
+        <p:txBody>
+          <a:bodyPr/>
+          <a:p/>
+        </p:txBody>
       </p:sp>
       <p:sp>
         <p:nvSpPr>
@@ -36586,6 +37142,10 @@
             <a:tailEnd type="triangle"/>
           </a:ln>
         </p:spPr>
+        <p:txBody>
+          <a:bodyPr/>
+          <a:p/>
+        </p:txBody>
       </p:sp>
       <p:sp>
         <p:nvSpPr>
@@ -36610,6 +37170,10 @@
             <a:tailEnd type="triangle"/>
           </a:ln>
         </p:spPr>
+        <p:txBody>
+          <a:bodyPr/>
+          <a:p/>
+        </p:txBody>
       </p:sp>
       <p:sp>
         <p:nvSpPr>
@@ -36634,6 +37198,10 @@
             <a:tailEnd type="triangle"/>
           </a:ln>
         </p:spPr>
+        <p:txBody>
+          <a:bodyPr/>
+          <a:p/>
+        </p:txBody>
       </p:sp>
       <p:sp>
         <p:nvSpPr>
@@ -36658,6 +37226,10 @@
             <a:tailEnd type="triangle"/>
           </a:ln>
         </p:spPr>
+        <p:txBody>
+          <a:bodyPr/>
+          <a:p/>
+        </p:txBody>
       </p:sp>
       <p:sp>
         <p:nvSpPr>
@@ -36960,6 +37532,10 @@
             <a:prstDash val="solid"/>
           </a:ln>
         </p:spPr>
+        <p:txBody>
+          <a:bodyPr/>
+          <a:p/>
+        </p:txBody>
       </p:sp>
       <p:sp>
         <p:nvSpPr>
@@ -37068,6 +37644,10 @@
             <a:prstDash val="solid"/>
           </a:ln>
         </p:spPr>
+        <p:txBody>
+          <a:bodyPr/>
+          <a:p/>
+        </p:txBody>
       </p:sp>
       <p:sp>
         <p:nvSpPr>
@@ -37176,6 +37756,10 @@
             <a:prstDash val="solid"/>
           </a:ln>
         </p:spPr>
+        <p:txBody>
+          <a:bodyPr/>
+          <a:p/>
+        </p:txBody>
       </p:sp>
       <p:sp>
         <p:nvSpPr>
@@ -37304,6 +37888,10 @@
             <a:prstDash val="solid"/>
           </a:ln>
         </p:spPr>
+        <p:txBody>
+          <a:bodyPr/>
+          <a:p/>
+        </p:txBody>
       </p:sp>
       <p:sp>
         <p:nvSpPr>
@@ -37412,6 +38000,10 @@
             <a:prstDash val="solid"/>
           </a:ln>
         </p:spPr>
+        <p:txBody>
+          <a:bodyPr/>
+          <a:p/>
+        </p:txBody>
       </p:sp>
       <p:sp>
         <p:nvSpPr>
@@ -37517,6 +38109,10 @@
             <a:tailEnd type="triangle"/>
           </a:ln>
         </p:spPr>
+        <p:txBody>
+          <a:bodyPr/>
+          <a:p/>
+        </p:txBody>
       </p:sp>
       <p:sp>
         <p:nvSpPr>
@@ -37541,6 +38137,10 @@
             <a:tailEnd type="triangle"/>
           </a:ln>
         </p:spPr>
+        <p:txBody>
+          <a:bodyPr/>
+          <a:p/>
+        </p:txBody>
       </p:sp>
       <p:sp>
         <p:nvSpPr>
@@ -37565,6 +38165,10 @@
             <a:tailEnd type="triangle"/>
           </a:ln>
         </p:spPr>
+        <p:txBody>
+          <a:bodyPr/>
+          <a:p/>
+        </p:txBody>
       </p:sp>
       <p:sp>
         <p:nvSpPr>
@@ -37589,6 +38193,10 @@
             <a:tailEnd type="triangle"/>
           </a:ln>
         </p:spPr>
+        <p:txBody>
+          <a:bodyPr/>
+          <a:p/>
+        </p:txBody>
       </p:sp>
       <p:sp>
         <p:nvSpPr>
@@ -37784,6 +38392,10 @@
             <a:prstDash val="solid"/>
           </a:ln>
         </p:spPr>
+        <p:txBody>
+          <a:bodyPr/>
+          <a:p/>
+        </p:txBody>
       </p:sp>
       <p:sp>
         <p:nvSpPr>
@@ -38002,6 +38614,10 @@
             <a:prstDash val="solid"/>
           </a:ln>
         </p:spPr>
+        <p:txBody>
+          <a:bodyPr/>
+          <a:p/>
+        </p:txBody>
       </p:sp>
       <p:sp>
         <p:nvSpPr>
@@ -38071,6 +38687,10 @@
             <a:prstDash val="solid"/>
           </a:ln>
         </p:spPr>
+        <p:txBody>
+          <a:bodyPr/>
+          <a:p/>
+        </p:txBody>
       </p:sp>
       <p:sp>
         <p:nvSpPr>
@@ -38137,6 +38757,10 @@
             <a:prstDash val="solid"/>
           </a:ln>
         </p:spPr>
+        <p:txBody>
+          <a:bodyPr/>
+          <a:p/>
+        </p:txBody>
       </p:sp>
       <p:sp>
         <p:nvSpPr>
@@ -38200,6 +38824,10 @@
             <a:tailEnd type="triangle"/>
           </a:ln>
         </p:spPr>
+        <p:txBody>
+          <a:bodyPr/>
+          <a:p/>
+        </p:txBody>
       </p:sp>
       <p:sp>
         <p:nvSpPr>
@@ -38269,6 +38897,10 @@
             <a:prstDash val="solid"/>
           </a:ln>
         </p:spPr>
+        <p:txBody>
+          <a:bodyPr/>
+          <a:p/>
+        </p:txBody>
       </p:sp>
       <p:sp>
         <p:nvSpPr>
@@ -38338,6 +38970,10 @@
             <a:prstDash val="solid"/>
           </a:ln>
         </p:spPr>
+        <p:txBody>
+          <a:bodyPr/>
+          <a:p/>
+        </p:txBody>
       </p:sp>
       <p:sp>
         <p:nvSpPr>
@@ -38404,6 +39040,10 @@
             <a:prstDash val="solid"/>
           </a:ln>
         </p:spPr>
+        <p:txBody>
+          <a:bodyPr/>
+          <a:p/>
+        </p:txBody>
       </p:sp>
       <p:sp>
         <p:nvSpPr>
@@ -38467,6 +39107,10 @@
             <a:tailEnd type="triangle"/>
           </a:ln>
         </p:spPr>
+        <p:txBody>
+          <a:bodyPr/>
+          <a:p/>
+        </p:txBody>
       </p:sp>
       <p:sp>
         <p:nvSpPr>
@@ -38494,6 +39138,10 @@
             <a:prstDash val="solid"/>
           </a:ln>
         </p:spPr>
+        <p:txBody>
+          <a:bodyPr/>
+          <a:p/>
+        </p:txBody>
       </p:sp>
       <p:sp>
         <p:nvSpPr>
@@ -38557,6 +39205,10 @@
             <a:tailEnd type="triangle"/>
           </a:ln>
         </p:spPr>
+        <p:txBody>
+          <a:bodyPr/>
+          <a:p/>
+        </p:txBody>
       </p:sp>
       <p:sp>
         <p:nvSpPr>
@@ -38626,6 +39278,10 @@
             <a:prstDash val="solid"/>
           </a:ln>
         </p:spPr>
+        <p:txBody>
+          <a:bodyPr/>
+          <a:p/>
+        </p:txBody>
       </p:sp>
       <p:sp>
         <p:nvSpPr>
@@ -38695,6 +39351,10 @@
             <a:prstDash val="solid"/>
           </a:ln>
         </p:spPr>
+        <p:txBody>
+          <a:bodyPr/>
+          <a:p/>
+        </p:txBody>
       </p:sp>
       <p:sp>
         <p:nvSpPr>
@@ -38761,6 +39421,10 @@
             <a:prstDash val="solid"/>
           </a:ln>
         </p:spPr>
+        <p:txBody>
+          <a:bodyPr/>
+          <a:p/>
+        </p:txBody>
       </p:sp>
       <p:sp>
         <p:nvSpPr>
@@ -38824,6 +39488,10 @@
             <a:tailEnd type="triangle"/>
           </a:ln>
         </p:spPr>
+        <p:txBody>
+          <a:bodyPr/>
+          <a:p/>
+        </p:txBody>
       </p:sp>
       <p:sp>
         <p:nvSpPr>
@@ -38851,6 +39519,10 @@
             <a:prstDash val="solid"/>
           </a:ln>
         </p:spPr>
+        <p:txBody>
+          <a:bodyPr/>
+          <a:p/>
+        </p:txBody>
       </p:sp>
       <p:sp>
         <p:nvSpPr>
@@ -38914,6 +39586,10 @@
             <a:tailEnd type="triangle"/>
           </a:ln>
         </p:spPr>
+        <p:txBody>
+          <a:bodyPr/>
+          <a:p/>
+        </p:txBody>
       </p:sp>
       <p:sp>
         <p:nvSpPr>
@@ -38983,6 +39659,10 @@
             <a:prstDash val="solid"/>
           </a:ln>
         </p:spPr>
+        <p:txBody>
+          <a:bodyPr/>
+          <a:p/>
+        </p:txBody>
       </p:sp>
       <p:sp>
         <p:nvSpPr>
@@ -39052,6 +39732,10 @@
             <a:prstDash val="solid"/>
           </a:ln>
         </p:spPr>
+        <p:txBody>
+          <a:bodyPr/>
+          <a:p/>
+        </p:txBody>
       </p:sp>
       <p:sp>
         <p:nvSpPr>
@@ -39118,6 +39802,10 @@
             <a:prstDash val="solid"/>
           </a:ln>
         </p:spPr>
+        <p:txBody>
+          <a:bodyPr/>
+          <a:p/>
+        </p:txBody>
       </p:sp>
       <p:sp>
         <p:nvSpPr>
@@ -39181,6 +39869,10 @@
             <a:tailEnd type="triangle"/>
           </a:ln>
         </p:spPr>
+        <p:txBody>
+          <a:bodyPr/>
+          <a:p/>
+        </p:txBody>
       </p:sp>
       <p:sp>
         <p:nvSpPr>
@@ -39208,6 +39900,10 @@
             <a:prstDash val="solid"/>
           </a:ln>
         </p:spPr>
+        <p:txBody>
+          <a:bodyPr/>
+          <a:p/>
+        </p:txBody>
       </p:sp>
       <p:sp>
         <p:nvSpPr>
@@ -39271,6 +39967,10 @@
             <a:tailEnd type="triangle"/>
           </a:ln>
         </p:spPr>
+        <p:txBody>
+          <a:bodyPr/>
+          <a:p/>
+        </p:txBody>
       </p:sp>
       <p:sp>
         <p:nvSpPr>
